--- a/Abpanick-Final Presentation.pptx
+++ b/Abpanick-Final Presentation.pptx
@@ -9155,7 +9155,7 @@
                 <a:cs typeface="Times New Roman"/>
                 <a:sym typeface="Times New Roman"/>
               </a:rPr>
-              <a:t>Abhilash Panicker</a:t>
+              <a:t>Name:	Abhilash Panicker</a:t>
             </a:r>
             <a:endParaRPr sz="1800" dirty="0">
               <a:latin typeface="Times New Roman"/>
@@ -9181,7 +9181,7 @@
                 <a:cs typeface="Times New Roman"/>
                 <a:sym typeface="Times New Roman"/>
               </a:rPr>
-              <a:t>Abhijit Chakraborty</a:t>
+              <a:t>Mentor: 	Abhijit Chakraborty</a:t>
             </a:r>
             <a:endParaRPr sz="1800" dirty="0">
               <a:latin typeface="Times New Roman"/>
@@ -9600,7 +9600,7 @@
         <p:spPr>
           <a:xfrm>
             <a:off x="725851" y="1853851"/>
-            <a:ext cx="4140616" cy="1969770"/>
+            <a:ext cx="4140616" cy="2308324"/>
           </a:xfrm>
           <a:prstGeom prst="rect">
             <a:avLst/>
@@ -9617,6 +9617,8 @@
               <a:rPr lang="en-IN" sz="1200" dirty="0"/>
               <a:t>Results – Cross-validation RMSE</a:t>
             </a:r>
+          </a:p>
+          <a:p>
             <a:endParaRPr lang="en-GB" sz="1200" b="1" u="sng" dirty="0">
               <a:solidFill>
                 <a:schemeClr val="accent1"/>
@@ -9672,6 +9674,20 @@
               </a:rPr>
               <a:t>Benchmarks the models against simple baselines.</a:t>
             </a:r>
+          </a:p>
+          <a:p>
+            <a:pPr marL="171450" indent="-171450">
+              <a:buFont typeface="Arial" panose="020B0604020202020204" pitchFamily="34" charset="0"/>
+              <a:buChar char="•"/>
+            </a:pPr>
+            <a:endParaRPr lang="en-GB" sz="1200" dirty="0">
+              <a:solidFill>
+                <a:schemeClr val="accent1"/>
+              </a:solidFill>
+              <a:latin typeface="Lato"/>
+              <a:ea typeface="Lato"/>
+              <a:cs typeface="Lato"/>
+            </a:endParaRPr>
           </a:p>
           <a:p>
             <a:r>
@@ -9932,7 +9948,7 @@
         <p:spPr>
           <a:xfrm>
             <a:off x="725851" y="1853851"/>
-            <a:ext cx="4140616" cy="2339102"/>
+            <a:ext cx="4140616" cy="2677656"/>
           </a:xfrm>
           <a:prstGeom prst="rect">
             <a:avLst/>
@@ -9949,6 +9965,8 @@
               <a:rPr lang="en-IN" sz="1200" dirty="0"/>
               <a:t>Interpretation – Permutation Importance</a:t>
             </a:r>
+          </a:p>
+          <a:p>
             <a:endParaRPr lang="en-GB" sz="1200" b="1" u="sng" dirty="0">
               <a:solidFill>
                 <a:schemeClr val="accent1"/>
@@ -10004,6 +10022,20 @@
               </a:rPr>
               <a:t>Helps assess whether macro variables add value.</a:t>
             </a:r>
+          </a:p>
+          <a:p>
+            <a:pPr marL="171450" indent="-171450">
+              <a:buFont typeface="Arial" panose="020B0604020202020204" pitchFamily="34" charset="0"/>
+              <a:buChar char="•"/>
+            </a:pPr>
+            <a:endParaRPr lang="en-GB" sz="1200" dirty="0">
+              <a:solidFill>
+                <a:schemeClr val="accent1"/>
+              </a:solidFill>
+              <a:latin typeface="Lato"/>
+              <a:ea typeface="Lato"/>
+              <a:cs typeface="Lato"/>
+            </a:endParaRPr>
           </a:p>
           <a:p>
             <a:r>
@@ -10315,6 +10347,9 @@
             </a:r>
           </a:p>
           <a:p>
+            <a:endParaRPr lang="en-GB" dirty="0"/>
+          </a:p>
+          <a:p>
             <a:pPr marL="146050" indent="0">
               <a:buNone/>
             </a:pPr>
@@ -10537,7 +10572,7 @@
         </p:spPr>
         <p:txBody>
           <a:bodyPr spcFirstLastPara="1" wrap="square" lIns="91425" tIns="91425" rIns="91425" bIns="91425" anchor="t" anchorCtr="0">
-            <a:normAutofit/>
+            <a:normAutofit fontScale="92500"/>
           </a:bodyPr>
           <a:lstStyle/>
           <a:p>
@@ -10553,8 +10588,7 @@
               </a:spcAft>
               <a:buClrTx/>
               <a:buSzTx/>
-              <a:buFontTx/>
-              <a:buChar char="•"/>
+              <a:buNone/>
             </a:pPr>
             <a:r>
               <a:rPr lang="en-US" altLang="en-US" b="1" u="sng" dirty="0">
@@ -10600,10 +10634,46 @@
               <a:buFontTx/>
               <a:buChar char="•"/>
             </a:pPr>
+            <a:endParaRPr lang="en-US" altLang="en-US" dirty="0"/>
+          </a:p>
+          <a:p>
+            <a:pPr marL="0" lvl="0" indent="0" eaLnBrk="0" fontAlgn="base" hangingPunct="0">
+              <a:lnSpc>
+                <a:spcPct val="100000"/>
+              </a:lnSpc>
+              <a:spcBef>
+                <a:spcPct val="0"/>
+              </a:spcBef>
+              <a:spcAft>
+                <a:spcPct val="0"/>
+              </a:spcAft>
+              <a:buClrTx/>
+              <a:buSzTx/>
+              <a:buFontTx/>
+              <a:buChar char="•"/>
+            </a:pPr>
             <a:r>
               <a:rPr lang="en-US" altLang="en-US" dirty="0"/>
               <a:t>Momentum carries the signal, but not enough to beat a constant mean on error.</a:t>
             </a:r>
+          </a:p>
+          <a:p>
+            <a:pPr marL="0" lvl="0" indent="0" eaLnBrk="0" fontAlgn="base" hangingPunct="0">
+              <a:lnSpc>
+                <a:spcPct val="100000"/>
+              </a:lnSpc>
+              <a:spcBef>
+                <a:spcPct val="0"/>
+              </a:spcBef>
+              <a:spcAft>
+                <a:spcPct val="0"/>
+              </a:spcAft>
+              <a:buClrTx/>
+              <a:buSzTx/>
+              <a:buFontTx/>
+              <a:buChar char="•"/>
+            </a:pPr>
+            <a:endParaRPr lang="en-US" altLang="en-US" dirty="0"/>
           </a:p>
           <a:p>
             <a:pPr marL="0" lvl="0" indent="0" eaLnBrk="0" fontAlgn="base" hangingPunct="0">
@@ -10802,7 +10872,7 @@
             </a:pPr>
             <a:r>
               <a:rPr lang="en-US" altLang="en-US" dirty="0"/>
-              <a:t>For research/sales: Publish a quarterly “Monsoon + Macro” note translating the latest IMD + CPI prints into scenario commentary.</a:t>
+              <a:t>For sell-side: Publish a quarterly “Monsoon + Macro” note translating the latest IMD + CPI prints into scenario commentary.</a:t>
             </a:r>
           </a:p>
           <a:p>
@@ -11466,8 +11536,8 @@
         </p:nvSpPr>
         <p:spPr>
           <a:xfrm>
-            <a:off x="797907" y="1761159"/>
-            <a:ext cx="7688700" cy="2261100"/>
+            <a:off x="797906" y="1761159"/>
+            <a:ext cx="8020629" cy="2857336"/>
           </a:xfrm>
           <a:prstGeom prst="rect">
             <a:avLst/>
@@ -11475,7 +11545,7 @@
         </p:spPr>
         <p:txBody>
           <a:bodyPr spcFirstLastPara="1" wrap="square" lIns="91425" tIns="91425" rIns="91425" bIns="91425" anchor="t" anchorCtr="0">
-            <a:normAutofit lnSpcReduction="10000"/>
+            <a:normAutofit fontScale="92500"/>
           </a:bodyPr>
           <a:lstStyle/>
           <a:p>
@@ -11519,14 +11589,7 @@
               <a:buFontTx/>
               <a:buChar char="•"/>
             </a:pPr>
-            <a:r>
-              <a:rPr lang="en-US" altLang="en-US" b="1" u="sng" dirty="0"/>
-              <a:t>Why it matters: </a:t>
-            </a:r>
-            <a:r>
-              <a:rPr lang="en-US" altLang="en-US" dirty="0"/>
-              <a:t>Weather and macro surprises often move markets; we test whether combining them improves timing for midcap exposure.</a:t>
-            </a:r>
+            <a:endParaRPr lang="en-US" altLang="en-US" dirty="0"/>
           </a:p>
           <a:p>
             <a:pPr marL="0" lvl="0" indent="0" eaLnBrk="0" fontAlgn="base" hangingPunct="0">
@@ -11546,11 +11609,11 @@
             </a:pPr>
             <a:r>
               <a:rPr lang="en-US" altLang="en-US" b="1" u="sng" dirty="0"/>
-              <a:t>Data: </a:t>
+              <a:t>Why it matters: </a:t>
             </a:r>
             <a:r>
               <a:rPr lang="en-US" altLang="en-US" dirty="0"/>
-              <a:t>India monsoon deviation from normal (IMD), inflation, GDP, policy rate, and index returns (2013–2025), aligned by quarter.</a:t>
+              <a:t>Weather and macro surprises often move markets; we test whether combining them improves timing for midcap exposure.</a:t>
             </a:r>
           </a:p>
           <a:p>
@@ -11569,6 +11632,67 @@
               <a:buFontTx/>
               <a:buChar char="•"/>
             </a:pPr>
+            <a:endParaRPr lang="en-US" altLang="en-US" dirty="0"/>
+          </a:p>
+          <a:p>
+            <a:pPr marL="0" lvl="0" indent="0" eaLnBrk="0" fontAlgn="base" hangingPunct="0">
+              <a:lnSpc>
+                <a:spcPct val="100000"/>
+              </a:lnSpc>
+              <a:spcBef>
+                <a:spcPct val="0"/>
+              </a:spcBef>
+              <a:spcAft>
+                <a:spcPct val="0"/>
+              </a:spcAft>
+              <a:buClrTx/>
+              <a:buSzTx/>
+              <a:buFontTx/>
+              <a:buChar char="•"/>
+            </a:pPr>
+            <a:r>
+              <a:rPr lang="en-US" altLang="en-US" b="1" u="sng" dirty="0"/>
+              <a:t>Data: </a:t>
+            </a:r>
+            <a:r>
+              <a:rPr lang="en-US" altLang="en-US" dirty="0"/>
+              <a:t>India monsoon deviation from normal (IMD), inflation, GDP, policy rate, and index returns (2013–2025), aligned by quarter.</a:t>
+            </a:r>
+          </a:p>
+          <a:p>
+            <a:pPr marL="0" lvl="0" indent="0" eaLnBrk="0" fontAlgn="base" hangingPunct="0">
+              <a:lnSpc>
+                <a:spcPct val="100000"/>
+              </a:lnSpc>
+              <a:spcBef>
+                <a:spcPct val="0"/>
+              </a:spcBef>
+              <a:spcAft>
+                <a:spcPct val="0"/>
+              </a:spcAft>
+              <a:buClrTx/>
+              <a:buSzTx/>
+              <a:buFontTx/>
+              <a:buChar char="•"/>
+            </a:pPr>
+            <a:endParaRPr lang="en-US" altLang="en-US" dirty="0"/>
+          </a:p>
+          <a:p>
+            <a:pPr marL="0" lvl="0" indent="0" eaLnBrk="0" fontAlgn="base" hangingPunct="0">
+              <a:lnSpc>
+                <a:spcPct val="100000"/>
+              </a:lnSpc>
+              <a:spcBef>
+                <a:spcPct val="0"/>
+              </a:spcBef>
+              <a:spcAft>
+                <a:spcPct val="0"/>
+              </a:spcAft>
+              <a:buClrTx/>
+              <a:buSzTx/>
+              <a:buFontTx/>
+              <a:buChar char="•"/>
+            </a:pPr>
             <a:r>
               <a:rPr lang="en-US" altLang="en-US" b="1" u="sng" dirty="0"/>
               <a:t>Approach: </a:t>
@@ -11577,6 +11701,24 @@
               <a:rPr lang="en-US" altLang="en-US" dirty="0"/>
               <a:t>Compare a simple baseline (previous quarter’s return) to an expanded model (adds monsoon + macro). Walk-forward validation.</a:t>
             </a:r>
+          </a:p>
+          <a:p>
+            <a:pPr marL="0" lvl="0" indent="0" eaLnBrk="0" fontAlgn="base" hangingPunct="0">
+              <a:lnSpc>
+                <a:spcPct val="100000"/>
+              </a:lnSpc>
+              <a:spcBef>
+                <a:spcPct val="0"/>
+              </a:spcBef>
+              <a:spcAft>
+                <a:spcPct val="0"/>
+              </a:spcAft>
+              <a:buClrTx/>
+              <a:buSzTx/>
+              <a:buFontTx/>
+              <a:buChar char="•"/>
+            </a:pPr>
+            <a:endParaRPr lang="en-US" altLang="en-US" dirty="0"/>
           </a:p>
           <a:p>
             <a:pPr marL="0" lvl="0" indent="0" eaLnBrk="0" fontAlgn="base" hangingPunct="0">
@@ -11726,7 +11868,7 @@
         </p:spPr>
         <p:txBody>
           <a:bodyPr spcFirstLastPara="1" wrap="square" lIns="91425" tIns="91425" rIns="91425" bIns="91425" anchor="t" anchorCtr="0">
-            <a:normAutofit fontScale="92500" lnSpcReduction="20000"/>
+            <a:normAutofit fontScale="85000" lnSpcReduction="20000"/>
           </a:bodyPr>
           <a:lstStyle/>
           <a:p>
@@ -11766,6 +11908,24 @@
               <a:buFontTx/>
               <a:buChar char="•"/>
             </a:pPr>
+            <a:endParaRPr lang="en-US" altLang="en-US" sz="1400" dirty="0"/>
+          </a:p>
+          <a:p>
+            <a:pPr marL="0" lvl="0" indent="0" eaLnBrk="0" fontAlgn="base" hangingPunct="0">
+              <a:lnSpc>
+                <a:spcPct val="100000"/>
+              </a:lnSpc>
+              <a:spcBef>
+                <a:spcPct val="0"/>
+              </a:spcBef>
+              <a:spcAft>
+                <a:spcPct val="0"/>
+              </a:spcAft>
+              <a:buClrTx/>
+              <a:buSzTx/>
+              <a:buFontTx/>
+              <a:buChar char="•"/>
+            </a:pPr>
             <a:r>
               <a:rPr lang="en-US" altLang="en-US" sz="1400" b="1" u="sng" dirty="0"/>
               <a:t>Gap:</a:t>
@@ -11774,6 +11934,24 @@
               <a:rPr lang="en-US" altLang="en-US" sz="1400" dirty="0"/>
               <a:t> No applied business study combining monsoon + macro to forecast midcap excess return next quarter.</a:t>
             </a:r>
+          </a:p>
+          <a:p>
+            <a:pPr marL="0" lvl="0" indent="0" eaLnBrk="0" fontAlgn="base" hangingPunct="0">
+              <a:lnSpc>
+                <a:spcPct val="100000"/>
+              </a:lnSpc>
+              <a:spcBef>
+                <a:spcPct val="0"/>
+              </a:spcBef>
+              <a:spcAft>
+                <a:spcPct val="0"/>
+              </a:spcAft>
+              <a:buClrTx/>
+              <a:buSzTx/>
+              <a:buFontTx/>
+              <a:buChar char="•"/>
+            </a:pPr>
+            <a:endParaRPr lang="en-US" altLang="en-US" sz="1400" dirty="0"/>
           </a:p>
           <a:p>
             <a:pPr marL="0" lvl="0" indent="0" eaLnBrk="0" fontAlgn="base" hangingPunct="0">
@@ -12264,7 +12442,7 @@
             </a:pPr>
             <a:r>
               <a:rPr lang="en-US" altLang="en-US" dirty="0"/>
-              <a:t>GDP: NSO/</a:t>
+              <a:t>Gross Domestic Product(GDP): </a:t>
             </a:r>
             <a:r>
               <a:rPr lang="en-US" altLang="en-US" dirty="0" err="1"/>
@@ -12272,7 +12450,7 @@
             </a:r>
             <a:r>
               <a:rPr lang="en-US" altLang="en-US" dirty="0"/>
-              <a:t>, quarterly GDP growth (YoY, %), 2014–2025.</a:t>
+              <a:t>(Institute), quarterly GDP growth (YoY, %), 2014–2025.</a:t>
             </a:r>
           </a:p>
           <a:p>
@@ -12627,7 +12805,7 @@
             </a:r>
             <a:r>
               <a:rPr lang="en-US" altLang="en-US" dirty="0"/>
-              <a:t>CPI was evaluated in the interim study and excluded from the final model due to very low incremental signal.</a:t>
+              <a:t>PMI was evaluated in the interim study and excluded from the final model due to very low incremental signal.</a:t>
             </a:r>
           </a:p>
           <a:p>
@@ -13509,7 +13687,7 @@
         <p:spPr>
           <a:xfrm>
             <a:off x="813662" y="1853851"/>
-            <a:ext cx="3890494" cy="1015663"/>
+            <a:ext cx="3890494" cy="1200329"/>
           </a:xfrm>
           <a:prstGeom prst="rect">
             <a:avLst/>
@@ -13538,6 +13716,21 @@
               </a:rPr>
               <a:t>Quarterly Pearson correlations. Most relationships are weak; the strongest with the target are still small (|r| ≲ 0.23). </a:t>
             </a:r>
+          </a:p>
+          <a:p>
+            <a:pPr marL="171450" indent="-171450">
+              <a:buFont typeface="Arial" panose="020B0604020202020204" pitchFamily="34" charset="0"/>
+              <a:buChar char="•"/>
+            </a:pPr>
+            <a:endParaRPr lang="en-GB" sz="1200" dirty="0">
+              <a:solidFill>
+                <a:schemeClr val="accent1"/>
+              </a:solidFill>
+              <a:latin typeface="Lato"/>
+              <a:ea typeface="Lato"/>
+              <a:cs typeface="Lato"/>
+              <a:sym typeface="Lato"/>
+            </a:endParaRPr>
           </a:p>
           <a:p>
             <a:pPr marL="171450" indent="-171450">
@@ -13636,10 +13829,10 @@
               <a:buNone/>
             </a:pPr>
             <a:r>
-              <a:rPr lang="en"/>
+              <a:rPr lang="en" dirty="0"/>
               <a:t>Architecture diagram/Workflow</a:t>
             </a:r>
-            <a:endParaRPr/>
+            <a:endParaRPr dirty="0"/>
           </a:p>
         </p:txBody>
       </p:sp>
@@ -13696,69 +13889,1043 @@
           </a:p>
         </p:txBody>
       </p:sp>
-      <p:pic>
-        <p:nvPicPr>
-          <p:cNvPr id="4" name="Picture 3" descr="A diagram of a structure&#10;&#10;AI-generated content may be incorrect.">
+      <p:sp>
+        <p:nvSpPr>
+          <p:cNvPr id="2" name="Rectangle: Rounded Corners 1">
             <a:extLst>
               <a:ext uri="{FF2B5EF4-FFF2-40B4-BE49-F238E27FC236}">
-                <a16:creationId xmlns:a16="http://schemas.microsoft.com/office/drawing/2014/main" id="{83416E9B-BF9B-D4E9-BB76-202612333DE5}"/>
+                <a16:creationId xmlns:a16="http://schemas.microsoft.com/office/drawing/2014/main" id="{7F2AEC67-865D-F96D-85BA-F780A1C6B9B1}"/>
               </a:ext>
             </a:extLst>
           </p:cNvPr>
-          <p:cNvPicPr>
-            <a:picLocks noChangeAspect="1"/>
-          </p:cNvPicPr>
-          <p:nvPr/>
-        </p:nvPicPr>
-        <p:blipFill>
-          <a:blip r:embed="rId3"/>
-          <a:stretch>
-            <a:fillRect/>
-          </a:stretch>
-        </p:blipFill>
-        <p:spPr>
-          <a:xfrm>
-            <a:off x="834339" y="1853850"/>
-            <a:ext cx="7905879" cy="2632909"/>
-          </a:xfrm>
-          <a:prstGeom prst="rect">
-            <a:avLst/>
-          </a:prstGeom>
-        </p:spPr>
-      </p:pic>
-      <p:sp>
-        <p:nvSpPr>
-          <p:cNvPr id="6" name="TextBox 5">
-            <a:extLst>
-              <a:ext uri="{FF2B5EF4-FFF2-40B4-BE49-F238E27FC236}">
-                <a16:creationId xmlns:a16="http://schemas.microsoft.com/office/drawing/2014/main" id="{9D09360A-71F3-5DBC-93C5-564472F5BA6C}"/>
-              </a:ext>
-            </a:extLst>
-          </p:cNvPr>
-          <p:cNvSpPr txBox="1"/>
+          <p:cNvSpPr/>
           <p:nvPr/>
         </p:nvSpPr>
         <p:spPr>
           <a:xfrm>
-            <a:off x="1821051" y="4486759"/>
-            <a:ext cx="4990454" cy="523220"/>
+            <a:off x="677528" y="2328095"/>
+            <a:ext cx="1615801" cy="448103"/>
           </a:xfrm>
-          <a:prstGeom prst="rect">
+          <a:prstGeom prst="roundRect">
             <a:avLst/>
           </a:prstGeom>
-          <a:noFill/>
         </p:spPr>
+        <p:style>
+          <a:lnRef idx="2">
+            <a:schemeClr val="dk1">
+              <a:shade val="15000"/>
+            </a:schemeClr>
+          </a:lnRef>
+          <a:fillRef idx="1">
+            <a:schemeClr val="dk1"/>
+          </a:fillRef>
+          <a:effectRef idx="0">
+            <a:schemeClr val="dk1"/>
+          </a:effectRef>
+          <a:fontRef idx="minor">
+            <a:schemeClr val="lt1"/>
+          </a:fontRef>
+        </p:style>
         <p:txBody>
-          <a:bodyPr wrap="square">
-            <a:spAutoFit/>
-          </a:bodyPr>
+          <a:bodyPr rtlCol="0" anchor="ctr"/>
           <a:lstStyle/>
           <a:p>
-            <a:r>
-              <a:rPr lang="en-GB" dirty="0"/>
-              <a:t>Quarter alignment avoids leakage; walk-forward mimics live deployment.</a:t>
-            </a:r>
-            <a:endParaRPr lang="en-IN" dirty="0"/>
+            <a:pPr algn="ctr"/>
+            <a:r>
+              <a:rPr lang="en-IN" sz="1200" dirty="0"/>
+              <a:t>Data Ingest</a:t>
+            </a:r>
+          </a:p>
+        </p:txBody>
+      </p:sp>
+      <p:sp>
+        <p:nvSpPr>
+          <p:cNvPr id="3" name="Rectangle: Rounded Corners 2">
+            <a:extLst>
+              <a:ext uri="{FF2B5EF4-FFF2-40B4-BE49-F238E27FC236}">
+                <a16:creationId xmlns:a16="http://schemas.microsoft.com/office/drawing/2014/main" id="{93186E55-9EF1-F048-BEAB-A9FD0DF78E72}"/>
+              </a:ext>
+            </a:extLst>
+          </p:cNvPr>
+          <p:cNvSpPr/>
+          <p:nvPr/>
+        </p:nvSpPr>
+        <p:spPr>
+          <a:xfrm>
+            <a:off x="2413603" y="2328095"/>
+            <a:ext cx="1363525" cy="448102"/>
+          </a:xfrm>
+          <a:prstGeom prst="roundRect">
+            <a:avLst/>
+          </a:prstGeom>
+        </p:spPr>
+        <p:style>
+          <a:lnRef idx="2">
+            <a:schemeClr val="accent2">
+              <a:shade val="15000"/>
+            </a:schemeClr>
+          </a:lnRef>
+          <a:fillRef idx="1">
+            <a:schemeClr val="accent2"/>
+          </a:fillRef>
+          <a:effectRef idx="0">
+            <a:schemeClr val="accent2"/>
+          </a:effectRef>
+          <a:fontRef idx="minor">
+            <a:schemeClr val="lt1"/>
+          </a:fontRef>
+        </p:style>
+        <p:txBody>
+          <a:bodyPr rtlCol="0" anchor="ctr"/>
+          <a:lstStyle/>
+          <a:p>
+            <a:pPr algn="ctr"/>
+            <a:r>
+              <a:rPr lang="en-IN" sz="1200" dirty="0"/>
+              <a:t>Quarter Alignment &amp; QC</a:t>
+            </a:r>
+          </a:p>
+        </p:txBody>
+      </p:sp>
+      <p:sp>
+        <p:nvSpPr>
+          <p:cNvPr id="5" name="Rectangle: Rounded Corners 4">
+            <a:extLst>
+              <a:ext uri="{FF2B5EF4-FFF2-40B4-BE49-F238E27FC236}">
+                <a16:creationId xmlns:a16="http://schemas.microsoft.com/office/drawing/2014/main" id="{B1A49F26-2DBD-845A-D98E-0FB1E1B651E7}"/>
+              </a:ext>
+            </a:extLst>
+          </p:cNvPr>
+          <p:cNvSpPr/>
+          <p:nvPr/>
+        </p:nvSpPr>
+        <p:spPr>
+          <a:xfrm>
+            <a:off x="3897402" y="2339103"/>
+            <a:ext cx="1815562" cy="448103"/>
+          </a:xfrm>
+          <a:prstGeom prst="roundRect">
+            <a:avLst/>
+          </a:prstGeom>
+        </p:spPr>
+        <p:style>
+          <a:lnRef idx="2">
+            <a:schemeClr val="dk1">
+              <a:shade val="15000"/>
+            </a:schemeClr>
+          </a:lnRef>
+          <a:fillRef idx="1">
+            <a:schemeClr val="dk1"/>
+          </a:fillRef>
+          <a:effectRef idx="0">
+            <a:schemeClr val="dk1"/>
+          </a:effectRef>
+          <a:fontRef idx="minor">
+            <a:schemeClr val="lt1"/>
+          </a:fontRef>
+        </p:style>
+        <p:txBody>
+          <a:bodyPr rtlCol="0" anchor="ctr"/>
+          <a:lstStyle/>
+          <a:p>
+            <a:pPr algn="ctr"/>
+            <a:r>
+              <a:rPr lang="en-IN" sz="1200" dirty="0"/>
+              <a:t>Feature Prep</a:t>
+            </a:r>
+          </a:p>
+        </p:txBody>
+      </p:sp>
+      <p:sp>
+        <p:nvSpPr>
+          <p:cNvPr id="7" name="Rectangle: Rounded Corners 6">
+            <a:extLst>
+              <a:ext uri="{FF2B5EF4-FFF2-40B4-BE49-F238E27FC236}">
+                <a16:creationId xmlns:a16="http://schemas.microsoft.com/office/drawing/2014/main" id="{B01E1F3D-A6F5-0DA2-D5AF-8AF89A37B74F}"/>
+              </a:ext>
+            </a:extLst>
+          </p:cNvPr>
+          <p:cNvSpPr/>
+          <p:nvPr/>
+        </p:nvSpPr>
+        <p:spPr>
+          <a:xfrm>
+            <a:off x="5833238" y="2339102"/>
+            <a:ext cx="1301913" cy="448103"/>
+          </a:xfrm>
+          <a:prstGeom prst="roundRect">
+            <a:avLst/>
+          </a:prstGeom>
+        </p:spPr>
+        <p:style>
+          <a:lnRef idx="2">
+            <a:schemeClr val="accent2">
+              <a:shade val="15000"/>
+            </a:schemeClr>
+          </a:lnRef>
+          <a:fillRef idx="1">
+            <a:schemeClr val="accent2"/>
+          </a:fillRef>
+          <a:effectRef idx="0">
+            <a:schemeClr val="accent2"/>
+          </a:effectRef>
+          <a:fontRef idx="minor">
+            <a:schemeClr val="lt1"/>
+          </a:fontRef>
+        </p:style>
+        <p:txBody>
+          <a:bodyPr rtlCol="0" anchor="ctr"/>
+          <a:lstStyle/>
+          <a:p>
+            <a:pPr algn="ctr"/>
+            <a:r>
+              <a:rPr lang="en-IN" sz="1200" dirty="0"/>
+              <a:t>Train Models</a:t>
+            </a:r>
+          </a:p>
+        </p:txBody>
+      </p:sp>
+      <p:sp>
+        <p:nvSpPr>
+          <p:cNvPr id="8" name="Rectangle: Rounded Corners 7">
+            <a:extLst>
+              <a:ext uri="{FF2B5EF4-FFF2-40B4-BE49-F238E27FC236}">
+                <a16:creationId xmlns:a16="http://schemas.microsoft.com/office/drawing/2014/main" id="{1AD82FD2-76D8-93DB-A28F-7D0BF3A39D80}"/>
+              </a:ext>
+            </a:extLst>
+          </p:cNvPr>
+          <p:cNvSpPr/>
+          <p:nvPr/>
+        </p:nvSpPr>
+        <p:spPr>
+          <a:xfrm>
+            <a:off x="7317037" y="2328095"/>
+            <a:ext cx="1240400" cy="448102"/>
+          </a:xfrm>
+          <a:prstGeom prst="roundRect">
+            <a:avLst/>
+          </a:prstGeom>
+        </p:spPr>
+        <p:style>
+          <a:lnRef idx="2">
+            <a:schemeClr val="dk1">
+              <a:shade val="15000"/>
+            </a:schemeClr>
+          </a:lnRef>
+          <a:fillRef idx="1">
+            <a:schemeClr val="dk1"/>
+          </a:fillRef>
+          <a:effectRef idx="0">
+            <a:schemeClr val="dk1"/>
+          </a:effectRef>
+          <a:fontRef idx="minor">
+            <a:schemeClr val="lt1"/>
+          </a:fontRef>
+        </p:style>
+        <p:txBody>
+          <a:bodyPr rtlCol="0" anchor="ctr"/>
+          <a:lstStyle/>
+          <a:p>
+            <a:pPr algn="ctr"/>
+            <a:r>
+              <a:rPr lang="en-IN" sz="1200" dirty="0"/>
+              <a:t>Walk-Forward Validation</a:t>
+            </a:r>
+          </a:p>
+        </p:txBody>
+      </p:sp>
+      <p:cxnSp>
+        <p:nvCxnSpPr>
+          <p:cNvPr id="10" name="Straight Arrow Connector 9">
+            <a:extLst>
+              <a:ext uri="{FF2B5EF4-FFF2-40B4-BE49-F238E27FC236}">
+                <a16:creationId xmlns:a16="http://schemas.microsoft.com/office/drawing/2014/main" id="{6F3E5A9D-F9D4-0EB1-AF35-02EF12E63F59}"/>
+              </a:ext>
+            </a:extLst>
+          </p:cNvPr>
+          <p:cNvCxnSpPr>
+            <a:cxnSpLocks/>
+            <a:stCxn id="2" idx="3"/>
+            <a:endCxn id="3" idx="1"/>
+          </p:cNvCxnSpPr>
+          <p:nvPr/>
+        </p:nvCxnSpPr>
+        <p:spPr>
+          <a:xfrm flipV="1">
+            <a:off x="2293329" y="2552146"/>
+            <a:ext cx="120274" cy="1"/>
+          </a:xfrm>
+          <a:prstGeom prst="straightConnector1">
+            <a:avLst/>
+          </a:prstGeom>
+          <a:ln>
+            <a:tailEnd type="triangle"/>
+          </a:ln>
+        </p:spPr>
+        <p:style>
+          <a:lnRef idx="1">
+            <a:schemeClr val="accent1"/>
+          </a:lnRef>
+          <a:fillRef idx="0">
+            <a:schemeClr val="accent1"/>
+          </a:fillRef>
+          <a:effectRef idx="0">
+            <a:schemeClr val="accent1"/>
+          </a:effectRef>
+          <a:fontRef idx="minor">
+            <a:schemeClr val="tx1"/>
+          </a:fontRef>
+        </p:style>
+      </p:cxnSp>
+      <p:cxnSp>
+        <p:nvCxnSpPr>
+          <p:cNvPr id="11" name="Straight Arrow Connector 10">
+            <a:extLst>
+              <a:ext uri="{FF2B5EF4-FFF2-40B4-BE49-F238E27FC236}">
+                <a16:creationId xmlns:a16="http://schemas.microsoft.com/office/drawing/2014/main" id="{904EE4CE-2A96-8FA0-404B-37151C636BD7}"/>
+              </a:ext>
+            </a:extLst>
+          </p:cNvPr>
+          <p:cNvCxnSpPr>
+            <a:cxnSpLocks/>
+            <a:stCxn id="3" idx="3"/>
+            <a:endCxn id="5" idx="1"/>
+          </p:cNvCxnSpPr>
+          <p:nvPr/>
+        </p:nvCxnSpPr>
+        <p:spPr>
+          <a:xfrm>
+            <a:off x="3777128" y="2552146"/>
+            <a:ext cx="120274" cy="11009"/>
+          </a:xfrm>
+          <a:prstGeom prst="straightConnector1">
+            <a:avLst/>
+          </a:prstGeom>
+          <a:ln>
+            <a:tailEnd type="triangle"/>
+          </a:ln>
+        </p:spPr>
+        <p:style>
+          <a:lnRef idx="1">
+            <a:schemeClr val="accent1"/>
+          </a:lnRef>
+          <a:fillRef idx="0">
+            <a:schemeClr val="accent1"/>
+          </a:fillRef>
+          <a:effectRef idx="0">
+            <a:schemeClr val="accent1"/>
+          </a:effectRef>
+          <a:fontRef idx="minor">
+            <a:schemeClr val="tx1"/>
+          </a:fontRef>
+        </p:style>
+      </p:cxnSp>
+      <p:cxnSp>
+        <p:nvCxnSpPr>
+          <p:cNvPr id="12" name="Straight Arrow Connector 11">
+            <a:extLst>
+              <a:ext uri="{FF2B5EF4-FFF2-40B4-BE49-F238E27FC236}">
+                <a16:creationId xmlns:a16="http://schemas.microsoft.com/office/drawing/2014/main" id="{5E6AF96A-A5B9-59AE-7D71-D1F1B674484E}"/>
+              </a:ext>
+            </a:extLst>
+          </p:cNvPr>
+          <p:cNvCxnSpPr>
+            <a:cxnSpLocks/>
+            <a:stCxn id="5" idx="3"/>
+            <a:endCxn id="7" idx="1"/>
+          </p:cNvCxnSpPr>
+          <p:nvPr/>
+        </p:nvCxnSpPr>
+        <p:spPr>
+          <a:xfrm flipV="1">
+            <a:off x="5712964" y="2563154"/>
+            <a:ext cx="120274" cy="1"/>
+          </a:xfrm>
+          <a:prstGeom prst="straightConnector1">
+            <a:avLst/>
+          </a:prstGeom>
+          <a:ln>
+            <a:tailEnd type="triangle"/>
+          </a:ln>
+        </p:spPr>
+        <p:style>
+          <a:lnRef idx="1">
+            <a:schemeClr val="accent1"/>
+          </a:lnRef>
+          <a:fillRef idx="0">
+            <a:schemeClr val="accent1"/>
+          </a:fillRef>
+          <a:effectRef idx="0">
+            <a:schemeClr val="accent1"/>
+          </a:effectRef>
+          <a:fontRef idx="minor">
+            <a:schemeClr val="tx1"/>
+          </a:fontRef>
+        </p:style>
+      </p:cxnSp>
+      <p:cxnSp>
+        <p:nvCxnSpPr>
+          <p:cNvPr id="13" name="Straight Arrow Connector 12">
+            <a:extLst>
+              <a:ext uri="{FF2B5EF4-FFF2-40B4-BE49-F238E27FC236}">
+                <a16:creationId xmlns:a16="http://schemas.microsoft.com/office/drawing/2014/main" id="{BA995B41-32BB-8E31-6125-25866B8625E6}"/>
+              </a:ext>
+            </a:extLst>
+          </p:cNvPr>
+          <p:cNvCxnSpPr>
+            <a:cxnSpLocks/>
+            <a:stCxn id="7" idx="3"/>
+            <a:endCxn id="8" idx="1"/>
+          </p:cNvCxnSpPr>
+          <p:nvPr/>
+        </p:nvCxnSpPr>
+        <p:spPr>
+          <a:xfrm flipV="1">
+            <a:off x="7135151" y="2552146"/>
+            <a:ext cx="181886" cy="11008"/>
+          </a:xfrm>
+          <a:prstGeom prst="straightConnector1">
+            <a:avLst/>
+          </a:prstGeom>
+          <a:ln>
+            <a:tailEnd type="triangle"/>
+          </a:ln>
+        </p:spPr>
+        <p:style>
+          <a:lnRef idx="1">
+            <a:schemeClr val="accent1"/>
+          </a:lnRef>
+          <a:fillRef idx="0">
+            <a:schemeClr val="accent1"/>
+          </a:fillRef>
+          <a:effectRef idx="0">
+            <a:schemeClr val="accent1"/>
+          </a:effectRef>
+          <a:fontRef idx="minor">
+            <a:schemeClr val="tx1"/>
+          </a:fontRef>
+        </p:style>
+      </p:cxnSp>
+      <p:sp>
+        <p:nvSpPr>
+          <p:cNvPr id="83" name="Speech Bubble: Rectangle with Corners Rounded 82">
+            <a:extLst>
+              <a:ext uri="{FF2B5EF4-FFF2-40B4-BE49-F238E27FC236}">
+                <a16:creationId xmlns:a16="http://schemas.microsoft.com/office/drawing/2014/main" id="{BBF074BC-FF7F-ABE4-6A93-5691562A2DC6}"/>
+              </a:ext>
+            </a:extLst>
+          </p:cNvPr>
+          <p:cNvSpPr/>
+          <p:nvPr/>
+        </p:nvSpPr>
+        <p:spPr>
+          <a:xfrm>
+            <a:off x="677528" y="3112762"/>
+            <a:ext cx="1615801" cy="1238239"/>
+          </a:xfrm>
+          <a:prstGeom prst="wedgeRoundRectCallout">
+            <a:avLst>
+              <a:gd name="adj1" fmla="val -31384"/>
+              <a:gd name="adj2" fmla="val -76432"/>
+              <a:gd name="adj3" fmla="val 16667"/>
+            </a:avLst>
+          </a:prstGeom>
+        </p:spPr>
+        <p:style>
+          <a:lnRef idx="2">
+            <a:schemeClr val="dk1">
+              <a:shade val="15000"/>
+            </a:schemeClr>
+          </a:lnRef>
+          <a:fillRef idx="1">
+            <a:schemeClr val="dk1"/>
+          </a:fillRef>
+          <a:effectRef idx="0">
+            <a:schemeClr val="dk1"/>
+          </a:effectRef>
+          <a:fontRef idx="minor">
+            <a:schemeClr val="lt1"/>
+          </a:fontRef>
+        </p:style>
+        <p:txBody>
+          <a:bodyPr rtlCol="0" anchor="ctr"/>
+          <a:lstStyle/>
+          <a:p>
+            <a:pPr lvl="0" eaLnBrk="0" fontAlgn="base" hangingPunct="0">
+              <a:spcBef>
+                <a:spcPct val="0"/>
+              </a:spcBef>
+              <a:spcAft>
+                <a:spcPct val="0"/>
+              </a:spcAft>
+              <a:buClrTx/>
+              <a:buFontTx/>
+              <a:buChar char="•"/>
+            </a:pPr>
+            <a:r>
+              <a:rPr lang="en-US" altLang="en-US" sz="1000" dirty="0">
+                <a:solidFill>
+                  <a:schemeClr val="bg1"/>
+                </a:solidFill>
+                <a:latin typeface="Arial" panose="020B0604020202020204" pitchFamily="34" charset="0"/>
+              </a:rPr>
+              <a:t>IMD: monsoon (Jun–Sep)</a:t>
+            </a:r>
+          </a:p>
+          <a:p>
+            <a:pPr lvl="0" eaLnBrk="0" fontAlgn="base" hangingPunct="0">
+              <a:spcBef>
+                <a:spcPct val="0"/>
+              </a:spcBef>
+              <a:spcAft>
+                <a:spcPct val="0"/>
+              </a:spcAft>
+              <a:buClrTx/>
+              <a:buFontTx/>
+              <a:buChar char="•"/>
+            </a:pPr>
+            <a:r>
+              <a:rPr lang="en-US" altLang="en-US" sz="1000" dirty="0" err="1">
+                <a:solidFill>
+                  <a:schemeClr val="bg1"/>
+                </a:solidFill>
+                <a:latin typeface="Arial" panose="020B0604020202020204" pitchFamily="34" charset="0"/>
+              </a:rPr>
+              <a:t>MoSPI</a:t>
+            </a:r>
+            <a:r>
+              <a:rPr lang="en-US" altLang="en-US" sz="1000" dirty="0">
+                <a:solidFill>
+                  <a:schemeClr val="bg1"/>
+                </a:solidFill>
+                <a:latin typeface="Arial" panose="020B0604020202020204" pitchFamily="34" charset="0"/>
+              </a:rPr>
+              <a:t>: GDP YoY</a:t>
+            </a:r>
+          </a:p>
+          <a:p>
+            <a:pPr lvl="0" eaLnBrk="0" fontAlgn="base" hangingPunct="0">
+              <a:spcBef>
+                <a:spcPct val="0"/>
+              </a:spcBef>
+              <a:spcAft>
+                <a:spcPct val="0"/>
+              </a:spcAft>
+              <a:buClrTx/>
+              <a:buFontTx/>
+              <a:buChar char="•"/>
+            </a:pPr>
+            <a:r>
+              <a:rPr lang="en-US" altLang="en-US" sz="1000" dirty="0">
+                <a:solidFill>
+                  <a:schemeClr val="bg1"/>
+                </a:solidFill>
+                <a:latin typeface="Arial" panose="020B0604020202020204" pitchFamily="34" charset="0"/>
+              </a:rPr>
+              <a:t>RBI: repo rate</a:t>
+            </a:r>
+          </a:p>
+          <a:p>
+            <a:pPr lvl="0" eaLnBrk="0" fontAlgn="base" hangingPunct="0">
+              <a:spcBef>
+                <a:spcPct val="0"/>
+              </a:spcBef>
+              <a:spcAft>
+                <a:spcPct val="0"/>
+              </a:spcAft>
+              <a:buClrTx/>
+              <a:buFontTx/>
+              <a:buChar char="•"/>
+            </a:pPr>
+            <a:r>
+              <a:rPr lang="en-US" altLang="en-US" sz="1000" dirty="0">
+                <a:solidFill>
+                  <a:schemeClr val="bg1"/>
+                </a:solidFill>
+                <a:latin typeface="Arial" panose="020B0604020202020204" pitchFamily="34" charset="0"/>
+              </a:rPr>
+              <a:t>NSE: NIFTY50 &amp; Midcap100</a:t>
+            </a:r>
+          </a:p>
+        </p:txBody>
+      </p:sp>
+      <p:sp>
+        <p:nvSpPr>
+          <p:cNvPr id="91" name="Speech Bubble: Rectangle with Corners Rounded 90">
+            <a:extLst>
+              <a:ext uri="{FF2B5EF4-FFF2-40B4-BE49-F238E27FC236}">
+                <a16:creationId xmlns:a16="http://schemas.microsoft.com/office/drawing/2014/main" id="{8EBAF0CE-FA21-9FAD-E8BA-FE7E8DC248AC}"/>
+              </a:ext>
+            </a:extLst>
+          </p:cNvPr>
+          <p:cNvSpPr/>
+          <p:nvPr/>
+        </p:nvSpPr>
+        <p:spPr>
+          <a:xfrm>
+            <a:off x="2415474" y="3108206"/>
+            <a:ext cx="1481928" cy="1231768"/>
+          </a:xfrm>
+          <a:prstGeom prst="wedgeRoundRectCallout">
+            <a:avLst>
+              <a:gd name="adj1" fmla="val -265"/>
+              <a:gd name="adj2" fmla="val -75514"/>
+              <a:gd name="adj3" fmla="val 16667"/>
+            </a:avLst>
+          </a:prstGeom>
+        </p:spPr>
+        <p:style>
+          <a:lnRef idx="2">
+            <a:schemeClr val="accent2">
+              <a:shade val="15000"/>
+            </a:schemeClr>
+          </a:lnRef>
+          <a:fillRef idx="1">
+            <a:schemeClr val="accent2"/>
+          </a:fillRef>
+          <a:effectRef idx="0">
+            <a:schemeClr val="accent2"/>
+          </a:effectRef>
+          <a:fontRef idx="minor">
+            <a:schemeClr val="lt1"/>
+          </a:fontRef>
+        </p:style>
+        <p:txBody>
+          <a:bodyPr rtlCol="0" anchor="ctr"/>
+          <a:lstStyle/>
+          <a:p>
+            <a:pPr lvl="0" eaLnBrk="0" fontAlgn="base" hangingPunct="0">
+              <a:spcBef>
+                <a:spcPct val="0"/>
+              </a:spcBef>
+              <a:spcAft>
+                <a:spcPct val="0"/>
+              </a:spcAft>
+              <a:buClrTx/>
+              <a:buFontTx/>
+              <a:buChar char="•"/>
+            </a:pPr>
+            <a:r>
+              <a:rPr lang="en-US" altLang="en-US" sz="1000" dirty="0">
+                <a:solidFill>
+                  <a:schemeClr val="bg1"/>
+                </a:solidFill>
+                <a:latin typeface="Arial" panose="020B0604020202020204" pitchFamily="34" charset="0"/>
+              </a:rPr>
+              <a:t>Stamp to calendar quarter-end</a:t>
+            </a:r>
+          </a:p>
+          <a:p>
+            <a:pPr lvl="0" eaLnBrk="0" fontAlgn="base" hangingPunct="0">
+              <a:spcBef>
+                <a:spcPct val="0"/>
+              </a:spcBef>
+              <a:spcAft>
+                <a:spcPct val="0"/>
+              </a:spcAft>
+              <a:buClrTx/>
+              <a:buFontTx/>
+              <a:buChar char="•"/>
+            </a:pPr>
+            <a:r>
+              <a:rPr lang="en-US" altLang="en-US" sz="1000" dirty="0">
+                <a:solidFill>
+                  <a:schemeClr val="bg1"/>
+                </a:solidFill>
+                <a:latin typeface="Arial" panose="020B0604020202020204" pitchFamily="34" charset="0"/>
+              </a:rPr>
+              <a:t>Monsoon stamped Sep-30, carried</a:t>
+            </a:r>
+          </a:p>
+          <a:p>
+            <a:pPr lvl="0" eaLnBrk="0" fontAlgn="base" hangingPunct="0">
+              <a:spcBef>
+                <a:spcPct val="0"/>
+              </a:spcBef>
+              <a:spcAft>
+                <a:spcPct val="0"/>
+              </a:spcAft>
+              <a:buClrTx/>
+              <a:buFontTx/>
+              <a:buChar char="•"/>
+            </a:pPr>
+            <a:r>
+              <a:rPr lang="en-US" altLang="en-US" sz="1000" dirty="0">
+                <a:solidFill>
+                  <a:schemeClr val="bg1"/>
+                </a:solidFill>
+                <a:latin typeface="Arial" panose="020B0604020202020204" pitchFamily="34" charset="0"/>
+              </a:rPr>
+              <a:t>QC checks; avoid look-ahead</a:t>
+            </a:r>
+          </a:p>
+        </p:txBody>
+      </p:sp>
+      <p:sp>
+        <p:nvSpPr>
+          <p:cNvPr id="92" name="Speech Bubble: Rectangle with Corners Rounded 91">
+            <a:extLst>
+              <a:ext uri="{FF2B5EF4-FFF2-40B4-BE49-F238E27FC236}">
+                <a16:creationId xmlns:a16="http://schemas.microsoft.com/office/drawing/2014/main" id="{23245A60-2F95-AAF8-5CE7-D699259942FE}"/>
+              </a:ext>
+            </a:extLst>
+          </p:cNvPr>
+          <p:cNvSpPr/>
+          <p:nvPr/>
+        </p:nvSpPr>
+        <p:spPr>
+          <a:xfrm>
+            <a:off x="3949324" y="3107277"/>
+            <a:ext cx="1634102" cy="1238240"/>
+          </a:xfrm>
+          <a:prstGeom prst="wedgeRoundRectCallout">
+            <a:avLst>
+              <a:gd name="adj1" fmla="val -34657"/>
+              <a:gd name="adj2" fmla="val -73552"/>
+              <a:gd name="adj3" fmla="val 16667"/>
+            </a:avLst>
+          </a:prstGeom>
+        </p:spPr>
+        <p:style>
+          <a:lnRef idx="2">
+            <a:schemeClr val="dk1">
+              <a:shade val="15000"/>
+            </a:schemeClr>
+          </a:lnRef>
+          <a:fillRef idx="1">
+            <a:schemeClr val="dk1"/>
+          </a:fillRef>
+          <a:effectRef idx="0">
+            <a:schemeClr val="dk1"/>
+          </a:effectRef>
+          <a:fontRef idx="minor">
+            <a:schemeClr val="lt1"/>
+          </a:fontRef>
+        </p:style>
+        <p:txBody>
+          <a:bodyPr rtlCol="0" anchor="ctr"/>
+          <a:lstStyle/>
+          <a:p>
+            <a:pPr lvl="0" eaLnBrk="0" fontAlgn="base" hangingPunct="0">
+              <a:spcBef>
+                <a:spcPct val="0"/>
+              </a:spcBef>
+              <a:spcAft>
+                <a:spcPct val="0"/>
+              </a:spcAft>
+              <a:buClrTx/>
+              <a:buFontTx/>
+              <a:buChar char="•"/>
+            </a:pPr>
+            <a:r>
+              <a:rPr lang="en-US" altLang="en-US" sz="1000" dirty="0">
+                <a:solidFill>
+                  <a:schemeClr val="bg1"/>
+                </a:solidFill>
+                <a:latin typeface="Arial" panose="020B0604020202020204" pitchFamily="34" charset="0"/>
+              </a:rPr>
+              <a:t>Momentum: lag-1, 4-Q avg</a:t>
+            </a:r>
+          </a:p>
+          <a:p>
+            <a:pPr lvl="0" eaLnBrk="0" fontAlgn="base" hangingPunct="0">
+              <a:spcBef>
+                <a:spcPct val="0"/>
+              </a:spcBef>
+              <a:spcAft>
+                <a:spcPct val="0"/>
+              </a:spcAft>
+              <a:buClrTx/>
+              <a:buFontTx/>
+              <a:buChar char="•"/>
+            </a:pPr>
+            <a:r>
+              <a:rPr lang="en-US" altLang="en-US" sz="1000" dirty="0">
+                <a:solidFill>
+                  <a:schemeClr val="bg1"/>
+                </a:solidFill>
+                <a:latin typeface="Arial" panose="020B0604020202020204" pitchFamily="34" charset="0"/>
+              </a:rPr>
+              <a:t>Monsoon deviation (%)</a:t>
+            </a:r>
+          </a:p>
+          <a:p>
+            <a:pPr lvl="0" eaLnBrk="0" fontAlgn="base" hangingPunct="0">
+              <a:spcBef>
+                <a:spcPct val="0"/>
+              </a:spcBef>
+              <a:spcAft>
+                <a:spcPct val="0"/>
+              </a:spcAft>
+              <a:buClrTx/>
+              <a:buFontTx/>
+              <a:buChar char="•"/>
+            </a:pPr>
+            <a:r>
+              <a:rPr lang="en-US" altLang="en-US" sz="1000" dirty="0">
+                <a:solidFill>
+                  <a:schemeClr val="bg1"/>
+                </a:solidFill>
+                <a:latin typeface="Arial" panose="020B0604020202020204" pitchFamily="34" charset="0"/>
+              </a:rPr>
+              <a:t>GDP growth (YoY, %)</a:t>
+            </a:r>
+          </a:p>
+          <a:p>
+            <a:pPr lvl="0" eaLnBrk="0" fontAlgn="base" hangingPunct="0">
+              <a:spcBef>
+                <a:spcPct val="0"/>
+              </a:spcBef>
+              <a:spcAft>
+                <a:spcPct val="0"/>
+              </a:spcAft>
+              <a:buClrTx/>
+              <a:buFontTx/>
+              <a:buChar char="•"/>
+            </a:pPr>
+            <a:r>
+              <a:rPr lang="en-US" altLang="en-US" sz="1000" dirty="0">
+                <a:solidFill>
+                  <a:schemeClr val="bg1"/>
+                </a:solidFill>
+                <a:latin typeface="Arial" panose="020B0604020202020204" pitchFamily="34" charset="0"/>
+              </a:rPr>
+              <a:t>Policy-rate Δ (bps)</a:t>
+            </a:r>
+          </a:p>
+          <a:p>
+            <a:pPr lvl="0" eaLnBrk="0" fontAlgn="base" hangingPunct="0">
+              <a:spcBef>
+                <a:spcPct val="0"/>
+              </a:spcBef>
+              <a:spcAft>
+                <a:spcPct val="0"/>
+              </a:spcAft>
+              <a:buClrTx/>
+              <a:buFontTx/>
+              <a:buChar char="•"/>
+            </a:pPr>
+            <a:r>
+              <a:rPr lang="en-US" altLang="en-US" sz="1000" dirty="0">
+                <a:solidFill>
+                  <a:schemeClr val="bg1"/>
+                </a:solidFill>
+                <a:latin typeface="Arial" panose="020B0604020202020204" pitchFamily="34" charset="0"/>
+              </a:rPr>
+              <a:t>Seasonality: </a:t>
+            </a:r>
+            <a:r>
+              <a:rPr lang="en-IN" sz="1000" dirty="0"/>
+              <a:t>quarter-of-year</a:t>
+            </a:r>
+            <a:endParaRPr lang="en-US" altLang="en-US" sz="1000" dirty="0">
+              <a:solidFill>
+                <a:schemeClr val="bg1"/>
+              </a:solidFill>
+              <a:latin typeface="Arial" panose="020B0604020202020204" pitchFamily="34" charset="0"/>
+            </a:endParaRPr>
+          </a:p>
+        </p:txBody>
+      </p:sp>
+      <p:sp>
+        <p:nvSpPr>
+          <p:cNvPr id="93" name="Speech Bubble: Rectangle with Corners Rounded 92">
+            <a:extLst>
+              <a:ext uri="{FF2B5EF4-FFF2-40B4-BE49-F238E27FC236}">
+                <a16:creationId xmlns:a16="http://schemas.microsoft.com/office/drawing/2014/main" id="{477923B6-EAA3-EFE9-213F-8D812A4C1936}"/>
+              </a:ext>
+            </a:extLst>
+          </p:cNvPr>
+          <p:cNvSpPr/>
+          <p:nvPr/>
+        </p:nvSpPr>
+        <p:spPr>
+          <a:xfrm>
+            <a:off x="7255677" y="3101732"/>
+            <a:ext cx="1240400" cy="1238241"/>
+          </a:xfrm>
+          <a:prstGeom prst="wedgeRoundRectCallout">
+            <a:avLst>
+              <a:gd name="adj1" fmla="val -31667"/>
+              <a:gd name="adj2" fmla="val -75340"/>
+              <a:gd name="adj3" fmla="val 16667"/>
+            </a:avLst>
+          </a:prstGeom>
+        </p:spPr>
+        <p:style>
+          <a:lnRef idx="2">
+            <a:schemeClr val="dk1">
+              <a:shade val="15000"/>
+            </a:schemeClr>
+          </a:lnRef>
+          <a:fillRef idx="1">
+            <a:schemeClr val="dk1"/>
+          </a:fillRef>
+          <a:effectRef idx="0">
+            <a:schemeClr val="dk1"/>
+          </a:effectRef>
+          <a:fontRef idx="minor">
+            <a:schemeClr val="lt1"/>
+          </a:fontRef>
+        </p:style>
+        <p:txBody>
+          <a:bodyPr rtlCol="0" anchor="ctr"/>
+          <a:lstStyle/>
+          <a:p>
+            <a:pPr lvl="0" eaLnBrk="0" fontAlgn="base" hangingPunct="0">
+              <a:spcBef>
+                <a:spcPct val="0"/>
+              </a:spcBef>
+              <a:spcAft>
+                <a:spcPct val="0"/>
+              </a:spcAft>
+              <a:buClrTx/>
+              <a:buFontTx/>
+              <a:buChar char="•"/>
+            </a:pPr>
+            <a:r>
+              <a:rPr lang="en-US" altLang="en-US" sz="1000" dirty="0">
+                <a:solidFill>
+                  <a:schemeClr val="bg1"/>
+                </a:solidFill>
+                <a:latin typeface="Arial" panose="020B0604020202020204" pitchFamily="34" charset="0"/>
+              </a:rPr>
+              <a:t>Expanding Timeseries Split (5)</a:t>
+            </a:r>
+          </a:p>
+          <a:p>
+            <a:pPr lvl="0" eaLnBrk="0" fontAlgn="base" hangingPunct="0">
+              <a:spcBef>
+                <a:spcPct val="0"/>
+              </a:spcBef>
+              <a:spcAft>
+                <a:spcPct val="0"/>
+              </a:spcAft>
+              <a:buClrTx/>
+              <a:buFontTx/>
+              <a:buChar char="•"/>
+            </a:pPr>
+            <a:r>
+              <a:rPr lang="en-US" altLang="en-US" sz="1000" dirty="0">
+                <a:solidFill>
+                  <a:schemeClr val="bg1"/>
+                </a:solidFill>
+                <a:latin typeface="Arial" panose="020B0604020202020204" pitchFamily="34" charset="0"/>
+              </a:rPr>
+              <a:t>Simulate deployment (unseen Qs)</a:t>
+            </a:r>
+          </a:p>
+        </p:txBody>
+      </p:sp>
+      <p:sp>
+        <p:nvSpPr>
+          <p:cNvPr id="95" name="Speech Bubble: Rectangle with Corners Rounded 94">
+            <a:extLst>
+              <a:ext uri="{FF2B5EF4-FFF2-40B4-BE49-F238E27FC236}">
+                <a16:creationId xmlns:a16="http://schemas.microsoft.com/office/drawing/2014/main" id="{058D3F02-1074-DCFF-C106-57A24F6C8DD0}"/>
+              </a:ext>
+            </a:extLst>
+          </p:cNvPr>
+          <p:cNvSpPr/>
+          <p:nvPr/>
+        </p:nvSpPr>
+        <p:spPr>
+          <a:xfrm>
+            <a:off x="5688845" y="3115997"/>
+            <a:ext cx="1394849" cy="1231768"/>
+          </a:xfrm>
+          <a:prstGeom prst="wedgeRoundRectCallout">
+            <a:avLst>
+              <a:gd name="adj1" fmla="val -2208"/>
+              <a:gd name="adj2" fmla="val -77270"/>
+              <a:gd name="adj3" fmla="val 16667"/>
+            </a:avLst>
+          </a:prstGeom>
+        </p:spPr>
+        <p:style>
+          <a:lnRef idx="2">
+            <a:schemeClr val="accent2">
+              <a:shade val="15000"/>
+            </a:schemeClr>
+          </a:lnRef>
+          <a:fillRef idx="1">
+            <a:schemeClr val="accent2"/>
+          </a:fillRef>
+          <a:effectRef idx="0">
+            <a:schemeClr val="accent2"/>
+          </a:effectRef>
+          <a:fontRef idx="minor">
+            <a:schemeClr val="lt1"/>
+          </a:fontRef>
+        </p:style>
+        <p:txBody>
+          <a:bodyPr rtlCol="0" anchor="ctr"/>
+          <a:lstStyle/>
+          <a:p>
+            <a:pPr lvl="0" eaLnBrk="0" fontAlgn="base" hangingPunct="0">
+              <a:spcBef>
+                <a:spcPct val="0"/>
+              </a:spcBef>
+              <a:spcAft>
+                <a:spcPct val="0"/>
+              </a:spcAft>
+              <a:buClrTx/>
+              <a:buFontTx/>
+              <a:buChar char="•"/>
+            </a:pPr>
+            <a:r>
+              <a:rPr lang="en-US" altLang="en-US" sz="1000" dirty="0">
+                <a:solidFill>
+                  <a:schemeClr val="bg1"/>
+                </a:solidFill>
+                <a:latin typeface="Arial" panose="020B0604020202020204" pitchFamily="34" charset="0"/>
+              </a:rPr>
+              <a:t>Baselines: mean, lag-1</a:t>
+            </a:r>
+          </a:p>
+          <a:p>
+            <a:pPr lvl="0" eaLnBrk="0" fontAlgn="base" hangingPunct="0">
+              <a:spcBef>
+                <a:spcPct val="0"/>
+              </a:spcBef>
+              <a:spcAft>
+                <a:spcPct val="0"/>
+              </a:spcAft>
+              <a:buClrTx/>
+              <a:buFontTx/>
+              <a:buChar char="•"/>
+            </a:pPr>
+            <a:r>
+              <a:rPr lang="en-US" altLang="en-US" sz="1000" dirty="0">
+                <a:solidFill>
+                  <a:schemeClr val="bg1"/>
+                </a:solidFill>
+                <a:latin typeface="Arial" panose="020B0604020202020204" pitchFamily="34" charset="0"/>
+              </a:rPr>
+              <a:t>Ridge, Lasso, GBR, RF</a:t>
+            </a:r>
+          </a:p>
+          <a:p>
+            <a:pPr lvl="0" eaLnBrk="0" fontAlgn="base" hangingPunct="0">
+              <a:spcBef>
+                <a:spcPct val="0"/>
+              </a:spcBef>
+              <a:spcAft>
+                <a:spcPct val="0"/>
+              </a:spcAft>
+              <a:buClrTx/>
+              <a:buFontTx/>
+              <a:buChar char="•"/>
+            </a:pPr>
+            <a:r>
+              <a:rPr lang="en-US" altLang="en-US" sz="1000" dirty="0">
+                <a:solidFill>
+                  <a:schemeClr val="bg1"/>
+                </a:solidFill>
+                <a:latin typeface="Arial" panose="020B0604020202020204" pitchFamily="34" charset="0"/>
+              </a:rPr>
+              <a:t>Target: next-Q spread (T→T+1)</a:t>
+            </a:r>
           </a:p>
         </p:txBody>
       </p:sp>
@@ -13841,8 +15008,8 @@
         </p:nvSpPr>
         <p:spPr>
           <a:xfrm>
-            <a:off x="729450" y="2078875"/>
-            <a:ext cx="7688700" cy="2261100"/>
+            <a:off x="729450" y="1797804"/>
+            <a:ext cx="8104584" cy="2898182"/>
           </a:xfrm>
           <a:prstGeom prst="rect">
             <a:avLst/>
@@ -13850,7 +15017,7 @@
         </p:spPr>
         <p:txBody>
           <a:bodyPr spcFirstLastPara="1" wrap="square" lIns="91425" tIns="91425" rIns="91425" bIns="91425" anchor="t" anchorCtr="0">
-            <a:normAutofit/>
+            <a:normAutofit fontScale="92500" lnSpcReduction="20000"/>
           </a:bodyPr>
           <a:lstStyle/>
           <a:p>
@@ -13866,16 +15033,11 @@
               </a:spcAft>
               <a:buClrTx/>
               <a:buSzTx/>
-              <a:buFontTx/>
-              <a:buChar char="•"/>
-            </a:pPr>
-            <a:r>
-              <a:rPr lang="en-US" altLang="en-US" sz="1200" b="1" u="sng" dirty="0"/>
-              <a:t>Target: </a:t>
-            </a:r>
-            <a:r>
-              <a:rPr lang="en-US" altLang="en-US" sz="1200" dirty="0"/>
-              <a:t>Next-quarter Midcap vs NIFTY outperformance (%).</a:t>
+              <a:buNone/>
+            </a:pPr>
+            <a:r>
+              <a:rPr lang="en-US" altLang="en-US" b="1" u="sng" dirty="0"/>
+              <a:t>Target (what we predict):</a:t>
             </a:r>
           </a:p>
           <a:p>
@@ -13891,16 +15053,11 @@
               </a:spcAft>
               <a:buClrTx/>
               <a:buSzTx/>
-              <a:buFontTx/>
-              <a:buChar char="•"/>
-            </a:pPr>
-            <a:r>
-              <a:rPr lang="en-US" altLang="en-US" sz="1200" b="1" u="sng" dirty="0"/>
-              <a:t>Features at time T:</a:t>
-            </a:r>
-            <a:r>
-              <a:rPr lang="en-US" altLang="en-US" sz="1200" dirty="0"/>
-              <a:t> Rainfall anomaly (%), CPI YoY (%), GDP YoY (%), repo Δ (basis points), seasonality (quarter sine/cosine), momentum (last-quarter spread; 4-Q average).</a:t>
+              <a:buNone/>
+            </a:pPr>
+            <a:r>
+              <a:rPr lang="en-US" altLang="en-US" dirty="0"/>
+              <a:t>Next-quarter Midcap − NIFTY spread (%).</a:t>
             </a:r>
           </a:p>
           <a:p>
@@ -13919,18 +15076,7 @@
               <a:buFontTx/>
               <a:buChar char="•"/>
             </a:pPr>
-            <a:r>
-              <a:rPr lang="en-US" altLang="en-US" sz="1200" b="1" u="sng" dirty="0"/>
-              <a:t>Models compared:</a:t>
-            </a:r>
-            <a:r>
-              <a:rPr lang="en-US" altLang="en-US" sz="1200" b="1" dirty="0"/>
-              <a:t> </a:t>
-            </a:r>
-            <a:r>
-              <a:rPr lang="en-US" altLang="en-US" sz="1200" dirty="0"/>
-              <a:t>Ridge, Lasso, Gradient Boosting, Random Forest vs naïve baselines (train-mean; last-quarter only).</a:t>
-            </a:r>
+            <a:endParaRPr lang="en-US" altLang="en-US" dirty="0"/>
           </a:p>
           <a:p>
             <a:pPr marL="0" lvl="0" indent="0" eaLnBrk="0" fontAlgn="base" hangingPunct="0">
@@ -13945,21 +15091,237 @@
               </a:spcAft>
               <a:buClrTx/>
               <a:buSzTx/>
+              <a:buNone/>
+            </a:pPr>
+            <a:r>
+              <a:rPr lang="en-US" altLang="en-US" b="1" u="sng" dirty="0"/>
+              <a:t>Features (available at time T):</a:t>
+            </a:r>
+            <a:br>
+              <a:rPr lang="en-US" altLang="en-US" dirty="0"/>
+            </a:br>
+            <a:r>
+              <a:rPr lang="en-US" altLang="en-US" dirty="0"/>
+              <a:t>– Monsoon deviation (%) (IMD, Jun–Sep stamped Sep-30 and carried)</a:t>
+            </a:r>
+            <a:br>
+              <a:rPr lang="en-US" altLang="en-US" dirty="0"/>
+            </a:br>
+            <a:r>
+              <a:rPr lang="en-US" altLang="en-US" dirty="0"/>
+              <a:t>– GDP growth (YoY, %); policy-rate change (bps)</a:t>
+            </a:r>
+            <a:br>
+              <a:rPr lang="en-US" altLang="en-US" dirty="0"/>
+            </a:br>
+            <a:r>
+              <a:rPr lang="en-US" altLang="en-US" dirty="0"/>
+              <a:t>– Momentum: last-quarter spread; 4-quarter average</a:t>
+            </a:r>
+            <a:br>
+              <a:rPr lang="en-US" altLang="en-US" dirty="0"/>
+            </a:br>
+            <a:r>
+              <a:rPr lang="en-US" altLang="en-US" dirty="0"/>
+              <a:t>– Seasonality: quarter-of-year (sin/cos)</a:t>
+            </a:r>
+          </a:p>
+          <a:p>
+            <a:pPr marL="0" lvl="0" indent="0" eaLnBrk="0" fontAlgn="base" hangingPunct="0">
+              <a:lnSpc>
+                <a:spcPct val="100000"/>
+              </a:lnSpc>
+              <a:spcBef>
+                <a:spcPct val="0"/>
+              </a:spcBef>
+              <a:spcAft>
+                <a:spcPct val="0"/>
+              </a:spcAft>
+              <a:buClrTx/>
+              <a:buSzTx/>
+              <a:buNone/>
+            </a:pPr>
+            <a:endParaRPr lang="en-US" altLang="en-US" dirty="0"/>
+          </a:p>
+          <a:p>
+            <a:pPr marL="0" lvl="0" indent="0" eaLnBrk="0" fontAlgn="base" hangingPunct="0">
+              <a:lnSpc>
+                <a:spcPct val="100000"/>
+              </a:lnSpc>
+              <a:spcBef>
+                <a:spcPct val="0"/>
+              </a:spcBef>
+              <a:spcAft>
+                <a:spcPct val="0"/>
+              </a:spcAft>
+              <a:buClrTx/>
+              <a:buSzTx/>
+              <a:buNone/>
+            </a:pPr>
+            <a:r>
+              <a:rPr lang="en-US" altLang="en-US" b="1" u="sng" dirty="0"/>
+              <a:t>Models compared:</a:t>
+            </a:r>
+          </a:p>
+          <a:p>
+            <a:pPr marL="0" lvl="0" indent="0" eaLnBrk="0" fontAlgn="base" hangingPunct="0">
+              <a:lnSpc>
+                <a:spcPct val="100000"/>
+              </a:lnSpc>
+              <a:spcBef>
+                <a:spcPct val="0"/>
+              </a:spcBef>
+              <a:spcAft>
+                <a:spcPct val="0"/>
+              </a:spcAft>
+              <a:buClrTx/>
+              <a:buSzTx/>
+              <a:buNone/>
+            </a:pPr>
+            <a:r>
+              <a:rPr lang="en-US" altLang="en-US" dirty="0"/>
+              <a:t>Ridge, Lasso, Gradient Boosting, Random Forest vs naïve baselines (train-mean; lag-1 only).</a:t>
+            </a:r>
+          </a:p>
+          <a:p>
+            <a:pPr marL="0" lvl="0" indent="0" eaLnBrk="0" fontAlgn="base" hangingPunct="0">
+              <a:lnSpc>
+                <a:spcPct val="100000"/>
+              </a:lnSpc>
+              <a:spcBef>
+                <a:spcPct val="0"/>
+              </a:spcBef>
+              <a:spcAft>
+                <a:spcPct val="0"/>
+              </a:spcAft>
+              <a:buClrTx/>
+              <a:buSzTx/>
+              <a:buNone/>
+            </a:pPr>
+            <a:endParaRPr lang="en-US" altLang="en-US" dirty="0"/>
+          </a:p>
+          <a:p>
+            <a:pPr marL="0" lvl="0" indent="0" eaLnBrk="0" fontAlgn="base" hangingPunct="0">
+              <a:lnSpc>
+                <a:spcPct val="100000"/>
+              </a:lnSpc>
+              <a:spcBef>
+                <a:spcPct val="0"/>
+              </a:spcBef>
+              <a:spcAft>
+                <a:spcPct val="0"/>
+              </a:spcAft>
+              <a:buClrTx/>
+              <a:buSzTx/>
+              <a:buNone/>
+            </a:pPr>
+            <a:r>
+              <a:rPr lang="en-US" altLang="en-US" b="1" u="sng" dirty="0"/>
+              <a:t>Validation design:</a:t>
+            </a:r>
+          </a:p>
+          <a:p>
+            <a:pPr marL="0" lvl="0" indent="0" eaLnBrk="0" fontAlgn="base" hangingPunct="0">
+              <a:lnSpc>
+                <a:spcPct val="100000"/>
+              </a:lnSpc>
+              <a:spcBef>
+                <a:spcPct val="0"/>
+              </a:spcBef>
+              <a:spcAft>
+                <a:spcPct val="0"/>
+              </a:spcAft>
+              <a:buClrTx/>
+              <a:buSzTx/>
+              <a:buNone/>
+            </a:pPr>
+            <a:r>
+              <a:rPr lang="en-US" altLang="en-US" dirty="0"/>
+              <a:t>Expanding </a:t>
+            </a:r>
+            <a:r>
+              <a:rPr lang="en-US" altLang="en-US" dirty="0" err="1"/>
+              <a:t>TimeSeries</a:t>
+            </a:r>
+            <a:r>
+              <a:rPr lang="en-US" altLang="en-US" dirty="0"/>
+              <a:t> Split (5 folds), no shuffling; features at T, target at T+1 to avoid look-ahead.</a:t>
+            </a:r>
+          </a:p>
+          <a:p>
+            <a:pPr marL="0" lvl="0" indent="0" eaLnBrk="0" fontAlgn="base" hangingPunct="0">
+              <a:lnSpc>
+                <a:spcPct val="100000"/>
+              </a:lnSpc>
+              <a:spcBef>
+                <a:spcPct val="0"/>
+              </a:spcBef>
+              <a:spcAft>
+                <a:spcPct val="0"/>
+              </a:spcAft>
+              <a:buClrTx/>
+              <a:buSzTx/>
+              <a:buNone/>
+            </a:pPr>
+            <a:endParaRPr lang="en-US" altLang="en-US" dirty="0"/>
+          </a:p>
+          <a:p>
+            <a:pPr marL="0" lvl="0" indent="0" eaLnBrk="0" fontAlgn="base" hangingPunct="0">
+              <a:lnSpc>
+                <a:spcPct val="100000"/>
+              </a:lnSpc>
+              <a:spcBef>
+                <a:spcPct val="0"/>
+              </a:spcBef>
+              <a:spcAft>
+                <a:spcPct val="0"/>
+              </a:spcAft>
+              <a:buClrTx/>
+              <a:buSzTx/>
+              <a:buNone/>
+            </a:pPr>
+            <a:r>
+              <a:rPr lang="en-US" altLang="en-US" b="1" u="sng" dirty="0"/>
+              <a:t>Evaluation:</a:t>
+            </a:r>
+          </a:p>
+          <a:p>
+            <a:pPr marL="0" lvl="0" indent="0" eaLnBrk="0" fontAlgn="base" hangingPunct="0">
+              <a:lnSpc>
+                <a:spcPct val="100000"/>
+              </a:lnSpc>
+              <a:spcBef>
+                <a:spcPct val="0"/>
+              </a:spcBef>
+              <a:spcAft>
+                <a:spcPct val="0"/>
+              </a:spcAft>
+              <a:buClrTx/>
+              <a:buSzTx/>
+              <a:buNone/>
+            </a:pPr>
+            <a:r>
+              <a:rPr lang="en-US" altLang="en-US" dirty="0"/>
+              <a:t>primary RMSE; report MAE, R² as supporting metrics.</a:t>
+            </a:r>
+          </a:p>
+          <a:p>
+            <a:pPr marL="0" lvl="0" indent="0" eaLnBrk="0" fontAlgn="base" hangingPunct="0">
+              <a:lnSpc>
+                <a:spcPct val="100000"/>
+              </a:lnSpc>
+              <a:spcBef>
+                <a:spcPct val="0"/>
+              </a:spcBef>
+              <a:spcAft>
+                <a:spcPct val="0"/>
+              </a:spcAft>
+              <a:buClrTx/>
+              <a:buSzTx/>
               <a:buFontTx/>
               <a:buChar char="•"/>
             </a:pPr>
-            <a:r>
-              <a:rPr lang="en-US" altLang="en-US" sz="1200" b="1" u="sng" dirty="0"/>
-              <a:t>Validation:</a:t>
-            </a:r>
-            <a:r>
-              <a:rPr lang="en-US" altLang="en-US" sz="1200" b="1" dirty="0"/>
-              <a:t> </a:t>
-            </a:r>
-            <a:r>
-              <a:rPr lang="en-US" altLang="en-US" sz="1200" dirty="0"/>
-              <a:t>Expanding-window time-series CV (5 folds), no shuffling.</a:t>
-            </a:r>
+            <a:endParaRPr lang="en-US" altLang="en-US" sz="1200" dirty="0"/>
           </a:p>
           <a:p>
             <a:pPr marL="0" lvl="0" indent="0" algn="l" rtl="0">

--- a/Abpanick-Final Presentation.pptx
+++ b/Abpanick-Final Presentation.pptx
@@ -290,6 +290,58 @@
     </p:ext>
   </p:extLst>
 </p:presentation>
+</file>
+
+<file path=ppt/revisionInfo.xml><?xml version="1.0" encoding="utf-8"?>
+<p1510:revInfo xmlns:a="http://schemas.openxmlformats.org/drawingml/2006/main" xmlns:r="http://schemas.openxmlformats.org/officeDocument/2006/relationships" xmlns:p1510="http://schemas.microsoft.com/office/powerpoint/2015/10/main">
+  <p1510:revLst>
+    <p1510:client id="{7394E5B7-3D76-4355-A99B-ED1C5D64A42C}" v="1" dt="2025-09-07T14:15:15.889"/>
+  </p1510:revLst>
+</p1510:revInfo>
+</file>
+
+<file path=ppt/changesInfos/changesInfo1.xml><?xml version="1.0" encoding="utf-8"?>
+<pc:chgInfo xmlns:a="http://schemas.openxmlformats.org/drawingml/2006/main" xmlns:r="http://schemas.openxmlformats.org/officeDocument/2006/relationships" xmlns:ac="http://schemas.microsoft.com/office/drawing/2013/main/command" xmlns:pc="http://schemas.microsoft.com/office/powerpoint/2013/main/command">
+  <pc:docChgLst>
+    <pc:chgData name="Abhilash Panicker" userId="b3697d40-78ff-4571-901a-605f2b67e3c3" providerId="ADAL" clId="{0AA2EE65-2990-4C97-BF95-E8144DB51F9B}"/>
+    <pc:docChg chg="modSld">
+      <pc:chgData name="Abhilash Panicker" userId="b3697d40-78ff-4571-901a-605f2b67e3c3" providerId="ADAL" clId="{0AA2EE65-2990-4C97-BF95-E8144DB51F9B}" dt="2025-09-07T14:15:29.095" v="3" actId="122"/>
+      <pc:docMkLst>
+        <pc:docMk/>
+      </pc:docMkLst>
+      <pc:sldChg chg="modSp mod">
+        <pc:chgData name="Abhilash Panicker" userId="b3697d40-78ff-4571-901a-605f2b67e3c3" providerId="ADAL" clId="{0AA2EE65-2990-4C97-BF95-E8144DB51F9B}" dt="2025-09-07T14:15:29.095" v="3" actId="122"/>
+        <pc:sldMkLst>
+          <pc:docMk/>
+          <pc:sldMk cId="0" sldId="256"/>
+        </pc:sldMkLst>
+        <pc:spChg chg="mod">
+          <ac:chgData name="Abhilash Panicker" userId="b3697d40-78ff-4571-901a-605f2b67e3c3" providerId="ADAL" clId="{0AA2EE65-2990-4C97-BF95-E8144DB51F9B}" dt="2025-09-07T14:15:29.095" v="3" actId="122"/>
+          <ac:spMkLst>
+            <pc:docMk/>
+            <pc:sldMk cId="0" sldId="256"/>
+            <ac:spMk id="86" creationId="{00000000-0000-0000-0000-000000000000}"/>
+          </ac:spMkLst>
+        </pc:spChg>
+      </pc:sldChg>
+      <pc:sldChg chg="modSp mod">
+        <pc:chgData name="Abhilash Panicker" userId="b3697d40-78ff-4571-901a-605f2b67e3c3" providerId="ADAL" clId="{0AA2EE65-2990-4C97-BF95-E8144DB51F9B}" dt="2025-09-07T13:25:03.430" v="0" actId="108"/>
+        <pc:sldMkLst>
+          <pc:docMk/>
+          <pc:sldMk cId="0" sldId="257"/>
+        </pc:sldMkLst>
+        <pc:spChg chg="mod">
+          <ac:chgData name="Abhilash Panicker" userId="b3697d40-78ff-4571-901a-605f2b67e3c3" providerId="ADAL" clId="{0AA2EE65-2990-4C97-BF95-E8144DB51F9B}" dt="2025-09-07T13:25:03.430" v="0" actId="108"/>
+          <ac:spMkLst>
+            <pc:docMk/>
+            <pc:sldMk cId="0" sldId="257"/>
+            <ac:spMk id="93" creationId="{00000000-0000-0000-0000-000000000000}"/>
+          </ac:spMkLst>
+        </pc:spChg>
+      </pc:sldChg>
+    </pc:docChg>
+  </pc:docChgLst>
+</pc:chgInfo>
 </file>
 
 <file path=ppt/notesMasters/notesMaster1.xml><?xml version="1.0" encoding="utf-8"?>
@@ -826,10 +878,10 @@
               <a:buNone/>
             </a:pPr>
             <a:r>
-              <a:rPr lang="en"/>
+              <a:rPr lang="en" dirty="0"/>
               <a:t>Student name - 2 marks</a:t>
             </a:r>
-            <a:endParaRPr/>
+            <a:endParaRPr dirty="0"/>
           </a:p>
           <a:p>
             <a:pPr marL="0" lvl="0" indent="0" algn="l" rtl="0">
@@ -842,10 +894,10 @@
               <a:buNone/>
             </a:pPr>
             <a:r>
-              <a:rPr lang="en"/>
+              <a:rPr lang="en" dirty="0"/>
               <a:t>Mentor’s name - 2 marks</a:t>
             </a:r>
-            <a:endParaRPr/>
+            <a:endParaRPr dirty="0"/>
           </a:p>
           <a:p>
             <a:pPr marL="0" lvl="0" indent="0" algn="l" rtl="0">
@@ -858,10 +910,10 @@
               <a:buNone/>
             </a:pPr>
             <a:r>
-              <a:rPr lang="en"/>
+              <a:rPr lang="en" dirty="0"/>
               <a:t>Topic name - 2 marks </a:t>
             </a:r>
-            <a:endParaRPr/>
+            <a:endParaRPr dirty="0"/>
           </a:p>
           <a:p>
             <a:pPr marL="0" lvl="0" indent="0" algn="l" rtl="0">
@@ -874,10 +926,10 @@
               <a:buNone/>
             </a:pPr>
             <a:r>
-              <a:rPr lang="en"/>
+              <a:rPr lang="en" dirty="0"/>
               <a:t>-&gt; automated grading</a:t>
             </a:r>
-            <a:endParaRPr/>
+            <a:endParaRPr dirty="0"/>
           </a:p>
         </p:txBody>
       </p:sp>
@@ -9055,52 +9107,21 @@
           </a:bodyPr>
           <a:lstStyle/>
           <a:p>
-            <a:pPr marL="0" lvl="0" indent="0" algn="l" rtl="0">
+            <a:pPr lvl="0" algn="ctr">
               <a:lnSpc>
                 <a:spcPct val="218181"/>
               </a:lnSpc>
               <a:spcBef>
                 <a:spcPts val="1200"/>
               </a:spcBef>
-              <a:spcAft>
-                <a:spcPts val="0"/>
-              </a:spcAft>
-              <a:buNone/>
-            </a:pPr>
-            <a:r>
-              <a:rPr lang="en" sz="2300" dirty="0">
-                <a:latin typeface="Times New Roman"/>
-                <a:ea typeface="Times New Roman"/>
-                <a:cs typeface="Times New Roman"/>
-                <a:sym typeface="Times New Roman"/>
-              </a:rPr>
-              <a:t>Data Analytics Capstone Topic</a:t>
-            </a:r>
-            <a:endParaRPr sz="2300" dirty="0">
-              <a:latin typeface="Times New Roman"/>
-              <a:ea typeface="Times New Roman"/>
-              <a:cs typeface="Times New Roman"/>
-              <a:sym typeface="Times New Roman"/>
-            </a:endParaRPr>
-          </a:p>
-          <a:p>
-            <a:pPr marL="0" lvl="0" indent="0" algn="l" rtl="0">
-              <a:lnSpc>
-                <a:spcPct val="218181"/>
-              </a:lnSpc>
-              <a:spcBef>
-                <a:spcPts val="1200"/>
-              </a:spcBef>
-              <a:spcAft>
-                <a:spcPts val="1200"/>
-              </a:spcAft>
-              <a:buClr>
-                <a:schemeClr val="dk1"/>
-              </a:buClr>
-              <a:buSzPts val="1100"/>
-              <a:buFont typeface="Arial"/>
-              <a:buNone/>
-            </a:pPr>
+            </a:pPr>
+            <a:r>
+              <a:rPr lang="en-US" sz="2400" dirty="0"/>
+              <a:t>Monsoon &amp; Macro Signals to Predict Stock Break-Out</a:t>
+            </a:r>
+            <a:br>
+              <a:rPr lang="en-US" sz="2400" dirty="0"/>
+            </a:br>
             <a:r>
               <a:rPr lang="en" sz="2300" dirty="0"/>
               <a:t>Final Presentation</a:t>
@@ -11741,28 +11762,8 @@
               <a:t>Result: </a:t>
             </a:r>
             <a:r>
-              <a:rPr lang="en-GB" b="1" dirty="0"/>
-              <a:t>No model beats naïve baselines</a:t>
-            </a:r>
-            <a:r>
               <a:rPr lang="en-GB" dirty="0"/>
-              <a:t> on this sample. </a:t>
-            </a:r>
-            <a:r>
-              <a:rPr lang="en-GB" b="1" dirty="0"/>
-              <a:t>Recent relative performance</a:t>
-            </a:r>
-            <a:r>
-              <a:rPr lang="en-GB" dirty="0"/>
-              <a:t> (last quarter’s spread) carries the most usable signal. </a:t>
-            </a:r>
-            <a:r>
-              <a:rPr lang="en-GB" b="1" dirty="0"/>
-              <a:t>Macro variables (inflation, GDP, policy rate, monsoon) show weak, unstable lift</a:t>
-            </a:r>
-            <a:r>
-              <a:rPr lang="en-GB" dirty="0"/>
-              <a:t> at a quarterly horizon</a:t>
+              <a:t>No model beats naïve baselines on this sample. Recent relative performance (last quarter’s spread) carries the most usable signal. Macro variables (inflation, GDP, policy rate, monsoon) show weak, unstable lift at a quarterly horizon</a:t>
             </a:r>
             <a:endParaRPr lang="en-US" altLang="en-US" dirty="0"/>
           </a:p>
@@ -15947,4 +15948,10 @@
   <a:objectDefaults/>
   <a:extraClrSchemeLst/>
 </a:theme>
+</file>
+
+<file path=docMetadata/LabelInfo.xml><?xml version="1.0" encoding="utf-8"?>
+<clbl:labelList xmlns:clbl="http://schemas.microsoft.com/office/2020/mipLabelMetadata">
+  <clbl:label id="{87ba5c36-b7cf-4793-bbc2-bd5b3a9f95ca}" enabled="1" method="Privileged" siteId="{72f988bf-86f1-41af-91ab-2d7cd011db47}" removed="0"/>
+</clbl:labelList>
 </file>